--- a/library/b01-creativity-ai/b01-creativity-ai.pptx
+++ b/library/b01-creativity-ai/b01-creativity-ai.pptx
@@ -3475,7 +3475,7 @@
         <p:spPr>
           <a:xfrm>
             <a:off x="1143000" y="3905250"/>
-            <a:ext cx="16002000" cy="1466088"/>
+            <a:ext cx="16002000" cy="2412492"/>
           </a:xfrm>
           <a:prstGeom prst="rect">
             <a:avLst/>
@@ -3494,7 +3494,7 @@
               </a:lnSpc>
             </a:pPr>
             <a:r>
-              <a:rPr sz="9300" b="1" spc="-347">
+              <a:rPr sz="8100" b="1" spc="-302">
                 <a:solidFill>
                   <a:srgbClr val="1A2A5E"/>
                 </a:solidFill>
@@ -3502,7 +3502,25 @@
                 <a:ea typeface="Pretendard"/>
                 <a:cs typeface="Pretendard"/>
               </a:rPr>
-              <a:t>창의력·복합문제 해결에서의 AI</a:t>
+              <a:t>창의력·복합문제</a:t>
+            </a:r>
+          </a:p>
+          <a:p>
+            <a:pPr algn="l">
+              <a:lnSpc>
+                <a:spcPct val="105000"/>
+              </a:lnSpc>
+            </a:pPr>
+            <a:r>
+              <a:rPr sz="8100" b="1" spc="-302">
+                <a:solidFill>
+                  <a:srgbClr val="1A2A5E"/>
+                </a:solidFill>
+                <a:latin typeface="Pretendard"/>
+                <a:ea typeface="Pretendard"/>
+                <a:cs typeface="Pretendard"/>
+              </a:rPr>
+              <a:t>해결에서의 AI</a:t>
             </a:r>
           </a:p>
         </p:txBody>
@@ -3515,7 +3533,7 @@
         </p:nvSpPr>
         <p:spPr>
           <a:xfrm>
-            <a:off x="1143000" y="5580888"/>
+            <a:off x="1143000" y="6527292"/>
             <a:ext cx="16002000" cy="571500"/>
           </a:xfrm>
           <a:prstGeom prst="rect">

--- a/library/b01-creativity-ai/b01-creativity-ai.pptx
+++ b/library/b01-creativity-ai/b01-creativity-ai.pptx
@@ -40221,7 +40221,7 @@
                 </a:solidFill>
                 <a:latin typeface="Pretendard"/>
               </a:rPr>
-              <a:t>1.  저작권 © 2026 이애본(드림아이티비즈 DreamIT Biz). 발행 홍문원(洪文院, 출판사 신고번호 제2026-000026호). 2026년 1월 「생성형 AI와 창의력·복합문제능력 향상 과정」 강의안을 전자출판용으로 다시 묶은 것입니다. ISBN: 등록 후 기재.</a:t>
+              <a:t>1.  저작권 © 2026 이애본(드림아이티비즈 DreamIT Biz). 발행 홍문원(洪文院, 출판사 신고번호 제2026-000026호). 이애본이 2026년 대학·기관 강의 현장에서 쓴 강의안을 전자출판용으로 다시 묶은 것입니다. ISBN: 등록 후 기재.</a:t>
             </a:r>
           </a:p>
           <a:p>
